--- a/Final_Revision/Exam_Practice/FR-L02_Writing_Workshop_People_Home_and_Free_Time.pptx
+++ b/Final_Revision/Exam_Practice/FR-L02_Writing_Workshop_People_Home_and_Free_Time.pptx
@@ -784,7 +784,11 @@
           <a:lstStyle/>
           <a:p>
             <a:r>
-              <a:rPr lang="en-US" dirty="0"/>
+              <a:rPr lang="ar-SA" dirty="0">
+                <a:latin typeface="Amiri" pitchFamily="2" charset="-78"/>
+                <a:ea typeface="Amiri" pitchFamily="2" charset="-78"/>
+                <a:cs typeface="Amiri" pitchFamily="2" charset="-78"/>
+              </a:rPr>
               <a:t>Q3 (3 min to choose and read). Title (أ) suits Core and Develop; title (ب) suits Stretch.</a:t>
             </a:r>
             <a:endParaRPr lang="en-US" dirty="0"/>
@@ -1403,7 +1407,11 @@
           <a:lstStyle/>
           <a:p>
             <a:r>
-              <a:rPr lang="en-US" dirty="0"/>
+              <a:rPr lang="ar-SA" dirty="0">
+                <a:latin typeface="Amiri" pitchFamily="2" charset="-78"/>
+                <a:ea typeface="Amiri" pitchFamily="2" charset="-78"/>
+                <a:cs typeface="Amiri" pitchFamily="2" charset="-78"/>
+              </a:rPr>
               <a:t>WELCOME (1 min) — while students join.
 • Greet each student by name as they arrive: السَّلَامُ عَلَيْكُمْ. Take the register (Pastoral Tracker: attendance 0/1).
 • 2-MINUTE CHECK-IN (SEND training): a private chat to any student who seemed unsettled last lesson — “Are you okay today? 👍 / 👎”.
@@ -1672,7 +1680,11 @@
           <a:lstStyle/>
           <a:p>
             <a:r>
-              <a:rPr lang="en-US" dirty="0"/>
+              <a:rPr lang="ar-SA" dirty="0">
+                <a:latin typeface="Amiri" pitchFamily="2" charset="-78"/>
+                <a:ea typeface="Amiri" pitchFamily="2" charset="-78"/>
+                <a:cs typeface="Amiri" pitchFamily="2" charset="-78"/>
+              </a:rPr>
               <a:t>QUESTION 1 — FORM FILLING. About 8 minutes. Core: boxes 1–6. Develop / Stretch: all 8. Box 4: the dual (akhawāni). A boy writes مَرِحٌ وَصَبُورٌ and reads تُرِيدُ / فَعَلْتَ in the headings.</a:t>
             </a:r>
             <a:endParaRPr lang="en-US" dirty="0"/>
@@ -1936,7 +1948,11 @@
           <a:lstStyle/>
           <a:p>
             <a:r>
-              <a:rPr lang="en-US" dirty="0"/>
+              <a:rPr lang="ar-SA" dirty="0">
+                <a:latin typeface="Amiri" pitchFamily="2" charset="-78"/>
+                <a:ea typeface="Amiri" pitchFamily="2" charset="-78"/>
+                <a:cs typeface="Amiri" pitchFamily="2" charset="-78"/>
+              </a:rPr>
               <a:t>Question words: مَتَى انْتَقَلْتُمْ (when did you move — PAST) · صِفِي (describe! — f.) · رَأْيُكِ (your opinion) · اُدْعِي (invite! — f.).</a:t>
             </a:r>
             <a:endParaRPr lang="en-US" dirty="0"/>
@@ -2508,6 +2524,7 @@
                   <a:srgbClr val="D4AF37"/>
                 </a:solidFill>
                 <a:latin typeface="Amiri" pitchFamily="2" charset="-78"/>
+                <a:ea typeface="Amiri" pitchFamily="2" charset="-78"/>
                 <a:cs typeface="Amiri" pitchFamily="2" charset="-78"/>
               </a:rPr>
               <a:t>م</a:t>
@@ -2714,6 +2731,7 @@
                   <a:srgbClr val="D4AF37"/>
                 </a:solidFill>
                 <a:latin typeface="Amiri" pitchFamily="2" charset="-78"/>
+                <a:ea typeface="Amiri" pitchFamily="2" charset="-78"/>
                 <a:cs typeface="Amiri" pitchFamily="2" charset="-78"/>
               </a:rPr>
               <a:t>وَرْشَةُ الكِتَابَةِ — النَّاسُ وَالبَيْتُ وَوَقْتُ الفَرَاغِ</a:t>
@@ -3171,6 +3189,7 @@
                   <a:srgbClr val="D4AF37"/>
                 </a:solidFill>
                 <a:latin typeface="Amiri" pitchFamily="2" charset="-78"/>
+                <a:ea typeface="Amiri" pitchFamily="2" charset="-78"/>
                 <a:cs typeface="Amiri" pitchFamily="2" charset="-78"/>
               </a:rPr>
               <a:t>م</a:t>
@@ -3491,6 +3510,7 @@
                   <a:srgbClr val="8A6D1E"/>
                 </a:solidFill>
                 <a:latin typeface="Amiri" pitchFamily="2" charset="-78"/>
+                <a:ea typeface="Amiri" pitchFamily="2" charset="-78"/>
                 <a:cs typeface="Amiri" pitchFamily="2" charset="-78"/>
               </a:rPr>
               <a:t>نَمُوذَجُ الإِجَابَةِ</a:t>
@@ -3604,6 +3624,7 @@
                   <a:srgbClr val="1F2A37"/>
                 </a:solidFill>
                 <a:latin typeface="Amiri" pitchFamily="2" charset="-78"/>
+                <a:ea typeface="Amiri" pitchFamily="2" charset="-78"/>
                 <a:cs typeface="Amiri" pitchFamily="2" charset="-78"/>
               </a:rPr>
               <a:t>مَرْحَبًا يَا سَلْمَى،</a:t>
@@ -3623,6 +3644,7 @@
                   <a:srgbClr val="1F2A37"/>
                 </a:solidFill>
                 <a:latin typeface="Amiri" pitchFamily="2" charset="-78"/>
+                <a:ea typeface="Amiri" pitchFamily="2" charset="-78"/>
                 <a:cs typeface="Amiri" pitchFamily="2" charset="-78"/>
               </a:rPr>
               <a:t>كَيْفَ حَالُكِ؟ عِنْدِي خَبَرٌ جَمِيلٌ: انْتَقَلْنَا إِلَى بَيْتٍ جَدِيدٍ الأُسْبُوعَ المَاضِيَ! البَيْتُ أَكْبَرُ مِنْ بَيْتِنَا القَدِيمِ، وَفِيهِ أَرْبَعُ غُرَفِ نَوْمٍ وَحَدِيقَةٌ صَغِيرَةٌ. غُرْفَتِي وَاسِعَةٌ وَمُشْمِسَةٌ، وَجُدْرَانُهَا زَرْقَاءُ. فِيهَا سَرِيرٌ أَبْيَضُ بِجَانِبِ النَّافِذَةِ، وَمَكْتَبٌ صَغِيرٌ لِلدِّرَاسَةِ. أُحِبُّ البَيْتَ كَثِيرًا، لٰكِنَّهُ بَعِيدٌ عَنِ المَدْرَسَةِ قَلِيلًا. يَوْمَ السَّبْتِ القَادِمِ سَنُنَظِّمُ حَفْلَةً صَغِيرَةً فِي الحَدِيقَةِ. هَلْ تُرِيدِينَ أَنْ تَأْتِي؟</a:t>
@@ -3642,6 +3664,7 @@
                   <a:srgbClr val="1F2A37"/>
                 </a:solidFill>
                 <a:latin typeface="Amiri" pitchFamily="2" charset="-78"/>
+                <a:ea typeface="Amiri" pitchFamily="2" charset="-78"/>
                 <a:cs typeface="Amiri" pitchFamily="2" charset="-78"/>
               </a:rPr>
               <a:t>مَعَ السَّلَامَةِ،</a:t>
@@ -3661,6 +3684,7 @@
                   <a:srgbClr val="1F2A37"/>
                 </a:solidFill>
                 <a:latin typeface="Amiri" pitchFamily="2" charset="-78"/>
+                <a:ea typeface="Amiri" pitchFamily="2" charset="-78"/>
                 <a:cs typeface="Amiri" pitchFamily="2" charset="-78"/>
               </a:rPr>
               <a:t>نَادِيَةُ</a:t>
@@ -3824,11 +3848,12 @@
               <a:buNone/>
             </a:pPr>
             <a:r>
-              <a:rPr lang="en-US" sz="950" b="1" dirty="0">
+              <a:rPr lang="ar-SA" sz="950" b="1" dirty="0">
                 <a:solidFill>
                   <a:srgbClr val="FFFFFF"/>
                 </a:solidFill>
                 <a:latin typeface="Calibri" pitchFamily="34" charset="0"/>
+                <a:ea typeface="Amiri" pitchFamily="2" charset="-78"/>
                 <a:cs typeface="Amiri" pitchFamily="2" charset="-78"/>
               </a:rPr>
               <a:t>أَكْبَرُ مِنْ</a:t>
@@ -3889,11 +3914,12 @@
               <a:buNone/>
             </a:pPr>
             <a:r>
-              <a:rPr lang="en-US" sz="950" b="1" dirty="0">
+              <a:rPr lang="ar-SA" sz="950" b="1" dirty="0">
                 <a:solidFill>
                   <a:srgbClr val="FFFFFF"/>
                 </a:solidFill>
                 <a:latin typeface="Calibri" pitchFamily="34" charset="0"/>
+                <a:ea typeface="Amiri" pitchFamily="2" charset="-78"/>
                 <a:cs typeface="Amiri" pitchFamily="2" charset="-78"/>
               </a:rPr>
               <a:t>وَجُدْرَانُهَا زَرْقَاءُ</a:t>
@@ -3954,11 +3980,12 @@
               <a:buNone/>
             </a:pPr>
             <a:r>
-              <a:rPr lang="en-US" sz="950" b="1" dirty="0">
+              <a:rPr lang="ar-SA" sz="950" b="1" dirty="0">
                 <a:solidFill>
                   <a:srgbClr val="FFFFFF"/>
                 </a:solidFill>
                 <a:latin typeface="Calibri" pitchFamily="34" charset="0"/>
+                <a:ea typeface="Amiri" pitchFamily="2" charset="-78"/>
                 <a:cs typeface="Amiri" pitchFamily="2" charset="-78"/>
               </a:rPr>
               <a:t>بِجَانِبِ النَّافِذَةِ</a:t>
@@ -4019,11 +4046,12 @@
               <a:buNone/>
             </a:pPr>
             <a:r>
-              <a:rPr lang="en-US" sz="950" b="1" dirty="0">
+              <a:rPr lang="ar-SA" sz="950" b="1" dirty="0">
                 <a:solidFill>
                   <a:srgbClr val="FFFFFF"/>
                 </a:solidFill>
                 <a:latin typeface="Calibri" pitchFamily="34" charset="0"/>
+                <a:ea typeface="Amiri" pitchFamily="2" charset="-78"/>
                 <a:cs typeface="Amiri" pitchFamily="2" charset="-78"/>
               </a:rPr>
               <a:t>هَلْ تُرِيدِينَ أَنْ تَأْتِي</a:t>
@@ -4157,6 +4185,7 @@
                   <a:srgbClr val="D4AF37"/>
                 </a:solidFill>
                 <a:latin typeface="Amiri" pitchFamily="2" charset="-78"/>
+                <a:ea typeface="Amiri" pitchFamily="2" charset="-78"/>
                 <a:cs typeface="Amiri" pitchFamily="2" charset="-78"/>
               </a:rPr>
               <a:t>م</a:t>
@@ -4477,6 +4506,7 @@
                   <a:srgbClr val="8A6D1E"/>
                 </a:solidFill>
                 <a:latin typeface="Amiri" pitchFamily="2" charset="-78"/>
+                <a:ea typeface="Amiri" pitchFamily="2" charset="-78"/>
                 <a:cs typeface="Amiri" pitchFamily="2" charset="-78"/>
               </a:rPr>
               <a:t>نَمُوذَجُ الإِجَابَةِ</a:t>
@@ -4590,6 +4620,7 @@
                   <a:srgbClr val="1F2A37"/>
                 </a:solidFill>
                 <a:latin typeface="Amiri" pitchFamily="2" charset="-78"/>
+                <a:ea typeface="Amiri" pitchFamily="2" charset="-78"/>
                 <a:cs typeface="Amiri" pitchFamily="2" charset="-78"/>
               </a:rPr>
               <a:t>عَزِيزَتِي سَلْمَى،</a:t>
@@ -4609,6 +4640,7 @@
                   <a:srgbClr val="1F2A37"/>
                 </a:solidFill>
                 <a:latin typeface="Amiri" pitchFamily="2" charset="-78"/>
+                <a:ea typeface="Amiri" pitchFamily="2" charset="-78"/>
                 <a:cs typeface="Amiri" pitchFamily="2" charset="-78"/>
               </a:rPr>
               <a:t>أَخِيرًا انْتَقَلْنَا إِلَى البَيْتِ الجَدِيدِ الَّذِي حَدَّثْتُكِ عَنْهُ! صَحِيحٌ أَنَّهُ أَبْعَدُ عَنِ المَدْرَسَةِ، غَيْرَ أَنَّهُ أَوْسَعُ بِكَثِيرٍ مِنْ شَقَّتِنَا القَدِيمَةِ، فَلِكُلٍّ مِنَّا غُرْفَتُهُ أَخِيرًا. أَمَّا غُرْفَتِي فَقَدْ دَهَنَّا جُدْرَانَهَا بِاللَّوْنِ الأَزْرَقِ الفَاتِحِ، وَوَضَعْتُ سَرِيرِي الأَبْيَضَ بِجَانِبِ النَّافِذَةِ الكَبِيرَةِ الَّتِي تُطِلُّ عَلَى الحَدِيقَةِ، كَمَا عَلَّقْتُ صُوَرَ رِحْلَتِنَا إِلَى إِسْبَانْيَا فَوْقَ المَكْتَبِ. وَأَجْمَلُ مَا فِي البَيْتِ شَجَرَةُ اللَّيْمُونِ الَّتِي تَمْلَأُ المَطْبَخَ بِرَائِحَتِهَا الجَمِيلَةِ فِي الصَّبَاحِ. وَإِذَا كَانَ الطَّقْسُ جَمِيلًا يَوْمَ السَّبْتِ، فَسَنُقِيمُ حَفْلَةً صَغِيرَةً فِي الحَدِيقَةِ. هَلْ تَأْتِينَ مَعَ أُخْتِكِ فِي الرَّابِعَةِ؟</a:t>
@@ -4628,6 +4660,7 @@
                   <a:srgbClr val="1F2A37"/>
                 </a:solidFill>
                 <a:latin typeface="Amiri" pitchFamily="2" charset="-78"/>
+                <a:ea typeface="Amiri" pitchFamily="2" charset="-78"/>
                 <a:cs typeface="Amiri" pitchFamily="2" charset="-78"/>
               </a:rPr>
               <a:t>بِمَحَبَّةٍ،</a:t>
@@ -4647,6 +4680,7 @@
                   <a:srgbClr val="1F2A37"/>
                 </a:solidFill>
                 <a:latin typeface="Amiri" pitchFamily="2" charset="-78"/>
+                <a:ea typeface="Amiri" pitchFamily="2" charset="-78"/>
                 <a:cs typeface="Amiri" pitchFamily="2" charset="-78"/>
               </a:rPr>
               <a:t>نَادِيَةُ</a:t>
@@ -4810,11 +4844,12 @@
               <a:buNone/>
             </a:pPr>
             <a:r>
-              <a:rPr lang="en-US" sz="950" b="1" dirty="0">
+              <a:rPr lang="ar-SA" sz="950" b="1" dirty="0">
                 <a:solidFill>
                   <a:srgbClr val="FFFFFF"/>
                 </a:solidFill>
                 <a:latin typeface="Calibri" pitchFamily="34" charset="0"/>
+                <a:ea typeface="Amiri" pitchFamily="2" charset="-78"/>
                 <a:cs typeface="Amiri" pitchFamily="2" charset="-78"/>
               </a:rPr>
               <a:t>الَّذِي حَدَّثْتُكِ عَنْهُ</a:t>
@@ -4875,11 +4910,12 @@
               <a:buNone/>
             </a:pPr>
             <a:r>
-              <a:rPr lang="en-US" sz="950" b="1" dirty="0">
+              <a:rPr lang="ar-SA" sz="950" b="1" dirty="0">
                 <a:solidFill>
                   <a:srgbClr val="FFFFFF"/>
                 </a:solidFill>
                 <a:latin typeface="Calibri" pitchFamily="34" charset="0"/>
+                <a:ea typeface="Amiri" pitchFamily="2" charset="-78"/>
                 <a:cs typeface="Amiri" pitchFamily="2" charset="-78"/>
               </a:rPr>
               <a:t>أَوْسَعُ بِكَثِيرٍ مِنْ</a:t>
@@ -4940,11 +4976,12 @@
               <a:buNone/>
             </a:pPr>
             <a:r>
-              <a:rPr lang="en-US" sz="950" b="1" dirty="0">
+              <a:rPr lang="ar-SA" sz="950" b="1" dirty="0">
                 <a:solidFill>
                   <a:srgbClr val="FFFFFF"/>
                 </a:solidFill>
                 <a:latin typeface="Calibri" pitchFamily="34" charset="0"/>
+                <a:ea typeface="Amiri" pitchFamily="2" charset="-78"/>
                 <a:cs typeface="Amiri" pitchFamily="2" charset="-78"/>
               </a:rPr>
               <a:t>الَّتِي تُطِلُّ عَلَى</a:t>
@@ -5005,11 +5042,12 @@
               <a:buNone/>
             </a:pPr>
             <a:r>
-              <a:rPr lang="en-US" sz="950" b="1" dirty="0">
+              <a:rPr lang="ar-SA" sz="950" b="1" dirty="0">
                 <a:solidFill>
                   <a:srgbClr val="FFFFFF"/>
                 </a:solidFill>
                 <a:latin typeface="Calibri" pitchFamily="34" charset="0"/>
+                <a:ea typeface="Amiri" pitchFamily="2" charset="-78"/>
                 <a:cs typeface="Amiri" pitchFamily="2" charset="-78"/>
               </a:rPr>
               <a:t>إِذَا كَانَ … فَسَنُقِيمُ</a:t>
@@ -5143,6 +5181,7 @@
                   <a:srgbClr val="D4AF37"/>
                 </a:solidFill>
                 <a:latin typeface="Amiri" pitchFamily="2" charset="-78"/>
+                <a:ea typeface="Amiri" pitchFamily="2" charset="-78"/>
                 <a:cs typeface="Amiri" pitchFamily="2" charset="-78"/>
               </a:rPr>
               <a:t>م</a:t>
@@ -5463,6 +5502,7 @@
                   <a:srgbClr val="8A6D1E"/>
                 </a:solidFill>
                 <a:latin typeface="Amiri" pitchFamily="2" charset="-78"/>
+                <a:ea typeface="Amiri" pitchFamily="2" charset="-78"/>
                 <a:cs typeface="Amiri" pitchFamily="2" charset="-78"/>
               </a:rPr>
               <a:t>اخْتَرْ عُنْوَانًا وَاحِدًا</a:t>
@@ -5743,6 +5783,7 @@
                   <a:srgbClr val="1B3B6F"/>
                 </a:solidFill>
                 <a:latin typeface="Amiri" pitchFamily="2" charset="-78"/>
+                <a:ea typeface="Amiri" pitchFamily="2" charset="-78"/>
                 <a:cs typeface="Amiri" pitchFamily="2" charset="-78"/>
               </a:rPr>
               <a:t>عُطْلَةٌ لَا أَنْسَاهَا مَعَ عَائِلَتِي وَأَصْدِقَائِي</a:t>
@@ -5781,6 +5822,7 @@
                   <a:srgbClr val="1B3B6F"/>
                 </a:solidFill>
                 <a:latin typeface="Amiri" pitchFamily="2" charset="-78"/>
+                <a:ea typeface="Amiri" pitchFamily="2" charset="-78"/>
                 <a:cs typeface="Amiri" pitchFamily="2" charset="-78"/>
               </a:rPr>
               <a:t>(أ)</a:t>
@@ -5887,6 +5929,7 @@
                   <a:srgbClr val="1B3B6F"/>
                 </a:solidFill>
                 <a:latin typeface="Amiri" pitchFamily="2" charset="-78"/>
+                <a:ea typeface="Amiri" pitchFamily="2" charset="-78"/>
                 <a:cs typeface="Amiri" pitchFamily="2" charset="-78"/>
               </a:rPr>
               <a:t>أَيْنَ ذَهَبْتَ وَمَعَ مَنْ · المَكَانُ الَّذِي أَقَمْتَ فِيهِ · مَاذَا فَعَلْتُمْ وَاشْتَرَيْتُمْ · رَأْيُكَ وَخُطَطُكَ لِلْعُطْلَةِ القَادِمَةِ</a:t>
@@ -6018,6 +6061,7 @@
                   <a:srgbClr val="1B3B6F"/>
                 </a:solidFill>
                 <a:latin typeface="Amiri" pitchFamily="2" charset="-78"/>
+                <a:ea typeface="Amiri" pitchFamily="2" charset="-78"/>
                 <a:cs typeface="Amiri" pitchFamily="2" charset="-78"/>
               </a:rPr>
               <a:t>هَلْ تُغْنِي صَدَاقَاتُ الإِنْتَرْنِتِ عَنِ الأَصْدِقَاءِ الحَقِيقِيِّينَ؟</a:t>
@@ -6056,6 +6100,7 @@
                   <a:srgbClr val="1B3B6F"/>
                 </a:solidFill>
                 <a:latin typeface="Amiri" pitchFamily="2" charset="-78"/>
+                <a:ea typeface="Amiri" pitchFamily="2" charset="-78"/>
                 <a:cs typeface="Amiri" pitchFamily="2" charset="-78"/>
               </a:rPr>
               <a:t>(ب)</a:t>
@@ -6159,6 +6204,7 @@
                   <a:srgbClr val="1B3B6F"/>
                 </a:solidFill>
                 <a:latin typeface="Amiri" pitchFamily="2" charset="-78"/>
+                <a:ea typeface="Amiri" pitchFamily="2" charset="-78"/>
                 <a:cs typeface="Amiri" pitchFamily="2" charset="-78"/>
               </a:rPr>
               <a:t>المَوْضُوعُ · المَزَايَا وَالحُدُودُ · مِثَالٌ مِنْ تَجْرِبَتِكَ · رَأْيُكَ</a:t>
@@ -6358,6 +6404,7 @@
                   <a:srgbClr val="D4AF37"/>
                 </a:solidFill>
                 <a:latin typeface="Amiri" pitchFamily="2" charset="-78"/>
+                <a:ea typeface="Amiri" pitchFamily="2" charset="-78"/>
                 <a:cs typeface="Amiri" pitchFamily="2" charset="-78"/>
               </a:rPr>
               <a:t>م</a:t>
@@ -6678,6 +6725,7 @@
                   <a:srgbClr val="8A6D1E"/>
                 </a:solidFill>
                 <a:latin typeface="Amiri" pitchFamily="2" charset="-78"/>
+                <a:ea typeface="Amiri" pitchFamily="2" charset="-78"/>
                 <a:cs typeface="Amiri" pitchFamily="2" charset="-78"/>
               </a:rPr>
               <a:t>خُطَّةُ الكِتَابَةِ</a:t>
@@ -7302,6 +7350,7 @@
                   <a:srgbClr val="1B3B6F"/>
                 </a:solidFill>
                 <a:latin typeface="Amiri" pitchFamily="2" charset="-78"/>
+                <a:ea typeface="Amiri" pitchFamily="2" charset="-78"/>
                 <a:cs typeface="Amiri" pitchFamily="2" charset="-78"/>
               </a:rPr>
               <a:t>أَقَمْنَا فِي شَقَّةٍ وَاسِعَةٍ قُرْبَ البَحْرِ.</a:t>
@@ -7401,6 +7450,7 @@
                   <a:srgbClr val="1B3B6F"/>
                 </a:solidFill>
                 <a:latin typeface="Amiri" pitchFamily="2" charset="-78"/>
+                <a:ea typeface="Amiri" pitchFamily="2" charset="-78"/>
                 <a:cs typeface="Amiri" pitchFamily="2" charset="-78"/>
               </a:rPr>
               <a:t>اشْتَرَيْتُ فُسْتَانًا أَحْمَرَ وَحَقِيبَةً زَرْقَاءَ.</a:t>
@@ -7500,6 +7550,7 @@
                   <a:srgbClr val="1B3B6F"/>
                 </a:solidFill>
                 <a:latin typeface="Amiri" pitchFamily="2" charset="-78"/>
+                <a:ea typeface="Amiri" pitchFamily="2" charset="-78"/>
                 <a:cs typeface="Amiri" pitchFamily="2" charset="-78"/>
               </a:rPr>
               <a:t>سَنُسَافِرُ إِلَى تُرْكِيَا فِي الصَّيْفِ القَادِمِ.</a:t>
@@ -7661,6 +7712,7 @@
                   <a:srgbClr val="1F2A37"/>
                 </a:solidFill>
                 <a:latin typeface="Amiri" pitchFamily="2" charset="-78"/>
+                <a:ea typeface="Amiri" pitchFamily="2" charset="-78"/>
                 <a:cs typeface="Amiri" pitchFamily="2" charset="-78"/>
               </a:rPr>
               <a:t>أ</a:t>
@@ -7687,6 +7739,7 @@
                   <a:srgbClr val="1F2A37"/>
                 </a:solidFill>
                 <a:latin typeface="Amiri" pitchFamily="2" charset="-78"/>
+                <a:ea typeface="Amiri" pitchFamily="2" charset="-78"/>
                 <a:cs typeface="Amiri" pitchFamily="2" charset="-78"/>
               </a:rPr>
               <a:t>ب</a:t>
@@ -7833,6 +7886,7 @@
                   <a:srgbClr val="D4AF37"/>
                 </a:solidFill>
                 <a:latin typeface="Amiri" pitchFamily="2" charset="-78"/>
+                <a:ea typeface="Amiri" pitchFamily="2" charset="-78"/>
                 <a:cs typeface="Amiri" pitchFamily="2" charset="-78"/>
               </a:rPr>
               <a:t>م</a:t>
@@ -8090,6 +8144,7 @@
                   <a:srgbClr val="8A6D1E"/>
                 </a:solidFill>
                 <a:latin typeface="Amiri" pitchFamily="2" charset="-78"/>
+                <a:ea typeface="Amiri" pitchFamily="2" charset="-78"/>
                 <a:cs typeface="Amiri" pitchFamily="2" charset="-78"/>
               </a:rPr>
               <a:t>أ</a:t>
@@ -8154,6 +8209,7 @@
                   <a:srgbClr val="1B3B6F"/>
                 </a:solidFill>
                 <a:latin typeface="Amiri" pitchFamily="2" charset="-78"/>
+                <a:ea typeface="Amiri" pitchFamily="2" charset="-78"/>
                 <a:cs typeface="Amiri" pitchFamily="2" charset="-78"/>
               </a:rPr>
               <a:t>أ</a:t>
@@ -8205,6 +8261,7 @@
                   <a:srgbClr val="8A6D1E"/>
                 </a:solidFill>
                 <a:latin typeface="Amiri" pitchFamily="2" charset="-78"/>
+                <a:ea typeface="Amiri" pitchFamily="2" charset="-78"/>
                 <a:cs typeface="Amiri" pitchFamily="2" charset="-78"/>
               </a:rPr>
               <a:t>نَمُوذَجُ الإِجَابَةِ</a:t>
@@ -8318,6 +8375,7 @@
                   <a:srgbClr val="1F2A37"/>
                 </a:solidFill>
                 <a:latin typeface="Amiri" pitchFamily="2" charset="-78"/>
+                <a:ea typeface="Amiri" pitchFamily="2" charset="-78"/>
                 <a:cs typeface="Amiri" pitchFamily="2" charset="-78"/>
               </a:rPr>
               <a:t>فِي الصَّيْفِ المَاضِي قَضَيْتُ أَجْمَلَ عُطْلَةٍ فِي حَيَاتِي. سَافَرْتُ مَعَ عَائِلَتِي وَصَدِيقَتِي جُودِي إِلَى مَدِينَةِ غَرْنَاطَةَ فِي إِسْبَانْيَا، وَبَقِينَا هُنَاكَ أُسْبُوعَيْنِ، وَكَانَ الجَوُّ حَارًّا وَمُشْمِسًا.</a:t>
@@ -8337,6 +8395,7 @@
                   <a:srgbClr val="1F2A37"/>
                 </a:solidFill>
                 <a:latin typeface="Amiri" pitchFamily="2" charset="-78"/>
+                <a:ea typeface="Amiri" pitchFamily="2" charset="-78"/>
                 <a:cs typeface="Amiri" pitchFamily="2" charset="-78"/>
               </a:rPr>
               <a:t>أَقَمْنَا فِي شَقَّةٍ جَمِيلَةٍ قُرْبَ وَسَطِ المَدِينَةِ. كَانَتِ الشَّقَّةُ وَاسِعَةً، وَغُرَفُهَا بَيْضَاءُ وَمُرِيحَةٌ. مِنَ النَّافِذَةِ كُنَّا نَرَى الجِبَالَ العَالِيَةَ وَالبُيُوتَ القَدِيمَةَ.</a:t>
@@ -8356,6 +8415,7 @@
                   <a:srgbClr val="1F2A37"/>
                 </a:solidFill>
                 <a:latin typeface="Amiri" pitchFamily="2" charset="-78"/>
+                <a:ea typeface="Amiri" pitchFamily="2" charset="-78"/>
                 <a:cs typeface="Amiri" pitchFamily="2" charset="-78"/>
               </a:rPr>
               <a:t>كُلَّ يَوْمٍ كُنَّا نَفْعَلُ شَيْئًا جَدِيدًا. أَوَّلًا زُرْنَا قَصْرَ الحَمْرَاءِ، وَكَانَ أَجْمَلَ مِنَ الصُّوَرِ. ثُمَّ ذَهَبْنَا إِلَى السُّوقِ، وَاشْتَرَيْتُ فُسْتَانًا أَحْمَرَ وَحَقِيبَةً زَرْقَاءَ. فِي المَسَاءِ كُنَّا نَأْكُلُ فِي مَطْعَمٍ صَغِيرٍ، وَنَلْعَبُ الوَرَقَ مَعَ أَبِي، وَكَانَ دَائِمًا يَفُوزُ!</a:t>
@@ -8375,6 +8435,7 @@
                   <a:srgbClr val="1F2A37"/>
                 </a:solidFill>
                 <a:latin typeface="Amiri" pitchFamily="2" charset="-78"/>
+                <a:ea typeface="Amiri" pitchFamily="2" charset="-78"/>
                 <a:cs typeface="Amiri" pitchFamily="2" charset="-78"/>
               </a:rPr>
               <a:t>أُحِبُّ السَّفَرَ مَعَ عَائِلَتِي، لِأَنَّنَا نَضْحَكُ كَثِيرًا وَنَتَعَلَّمُ أَشْيَاءَ جَدِيدَةً. وَجُودِي صَدِيقَةٌ مَرِحَةٌ وَلَطِيفَةٌ، وَهِيَ أَطْوَلُ مِنِّي قَلِيلًا. فِي الصَّيْفِ القَادِمِ سَنُسَافِرُ إِلَى تُرْكِيَا، وَأُرِيدُ أَنْ تَأْتِيَ جُودِي مَعَنَا مَرَّةً أُخْرَى.</a:t>
@@ -8538,11 +8599,12 @@
               <a:buNone/>
             </a:pPr>
             <a:r>
-              <a:rPr lang="en-US" sz="950" b="1" dirty="0">
+              <a:rPr lang="ar-SA" sz="950" b="1" dirty="0">
                 <a:solidFill>
                   <a:srgbClr val="FFFFFF"/>
                 </a:solidFill>
                 <a:latin typeface="Calibri" pitchFamily="34" charset="0"/>
+                <a:ea typeface="Amiri" pitchFamily="2" charset="-78"/>
                 <a:cs typeface="Amiri" pitchFamily="2" charset="-78"/>
               </a:rPr>
               <a:t>قَضَيْتُ أَجْمَلَ عُطْلَةٍ</a:t>
@@ -8603,11 +8665,12 @@
               <a:buNone/>
             </a:pPr>
             <a:r>
-              <a:rPr lang="en-US" sz="950" b="1" dirty="0">
+              <a:rPr lang="ar-SA" sz="950" b="1" dirty="0">
                 <a:solidFill>
                   <a:srgbClr val="FFFFFF"/>
                 </a:solidFill>
                 <a:latin typeface="Calibri" pitchFamily="34" charset="0"/>
+                <a:ea typeface="Amiri" pitchFamily="2" charset="-78"/>
                 <a:cs typeface="Amiri" pitchFamily="2" charset="-78"/>
               </a:rPr>
               <a:t>وَغُرَفُهَا بَيْضَاءُ</a:t>
@@ -8668,11 +8731,12 @@
               <a:buNone/>
             </a:pPr>
             <a:r>
-              <a:rPr lang="en-US" sz="950" b="1" dirty="0">
+              <a:rPr lang="ar-SA" sz="950" b="1" dirty="0">
                 <a:solidFill>
                   <a:srgbClr val="FFFFFF"/>
                 </a:solidFill>
                 <a:latin typeface="Calibri" pitchFamily="34" charset="0"/>
+                <a:ea typeface="Amiri" pitchFamily="2" charset="-78"/>
                 <a:cs typeface="Amiri" pitchFamily="2" charset="-78"/>
               </a:rPr>
               <a:t>أَجْمَلَ مِنَ الصُّوَرِ</a:t>
@@ -8733,11 +8797,12 @@
               <a:buNone/>
             </a:pPr>
             <a:r>
-              <a:rPr lang="en-US" sz="950" b="1" dirty="0">
+              <a:rPr lang="ar-SA" sz="950" b="1" dirty="0">
                 <a:solidFill>
                   <a:srgbClr val="FFFFFF"/>
                 </a:solidFill>
                 <a:latin typeface="Calibri" pitchFamily="34" charset="0"/>
+                <a:ea typeface="Amiri" pitchFamily="2" charset="-78"/>
                 <a:cs typeface="Amiri" pitchFamily="2" charset="-78"/>
               </a:rPr>
               <a:t>فُسْتَانًا أَحْمَرَ</a:t>
@@ -8871,6 +8936,7 @@
                   <a:srgbClr val="D4AF37"/>
                 </a:solidFill>
                 <a:latin typeface="Amiri" pitchFamily="2" charset="-78"/>
+                <a:ea typeface="Amiri" pitchFamily="2" charset="-78"/>
                 <a:cs typeface="Amiri" pitchFamily="2" charset="-78"/>
               </a:rPr>
               <a:t>م</a:t>
@@ -9128,6 +9194,7 @@
                   <a:srgbClr val="8A6D1E"/>
                 </a:solidFill>
                 <a:latin typeface="Amiri" pitchFamily="2" charset="-78"/>
+                <a:ea typeface="Amiri" pitchFamily="2" charset="-78"/>
                 <a:cs typeface="Amiri" pitchFamily="2" charset="-78"/>
               </a:rPr>
               <a:t>أ</a:t>
@@ -9192,6 +9259,7 @@
                   <a:srgbClr val="1B3B6F"/>
                 </a:solidFill>
                 <a:latin typeface="Amiri" pitchFamily="2" charset="-78"/>
+                <a:ea typeface="Amiri" pitchFamily="2" charset="-78"/>
                 <a:cs typeface="Amiri" pitchFamily="2" charset="-78"/>
               </a:rPr>
               <a:t>أ</a:t>
@@ -9243,6 +9311,7 @@
                   <a:srgbClr val="8A6D1E"/>
                 </a:solidFill>
                 <a:latin typeface="Amiri" pitchFamily="2" charset="-78"/>
+                <a:ea typeface="Amiri" pitchFamily="2" charset="-78"/>
                 <a:cs typeface="Amiri" pitchFamily="2" charset="-78"/>
               </a:rPr>
               <a:t>نَمُوذَجُ الإِجَابَةِ</a:t>
@@ -9356,6 +9425,7 @@
                   <a:srgbClr val="1F2A37"/>
                 </a:solidFill>
                 <a:latin typeface="Amiri" pitchFamily="2" charset="-78"/>
+                <a:ea typeface="Amiri" pitchFamily="2" charset="-78"/>
                 <a:cs typeface="Amiri" pitchFamily="2" charset="-78"/>
               </a:rPr>
               <a:t>لَمْ تَكُنْ عُطْلَتُنَا فِي غَرْنَاطَةَ الصَّيْفَ المَاضِيَ أَطْوَلَ عُطْلَةٍ قَضَيْتُهَا، غَيْرَ أَنَّهَا كَانَتْ أَجْمَلَهَا بِلَا شَكٍّ؛ فَلِأَوَّلِ مَرَّةٍ رَافَقَتْنَا صَدِيقَتِي جُودِي، فَصَارَتِ الرِّحْلَةُ رِحْلَتَيْنِ: رِحْلَةَ عَائِلَةٍ، وَرِحْلَةَ صَدَاقَةٍ.</a:t>
@@ -9375,6 +9445,7 @@
                   <a:srgbClr val="1F2A37"/>
                 </a:solidFill>
                 <a:latin typeface="Amiri" pitchFamily="2" charset="-78"/>
+                <a:ea typeface="Amiri" pitchFamily="2" charset="-78"/>
                 <a:cs typeface="Amiri" pitchFamily="2" charset="-78"/>
               </a:rPr>
               <a:t>أَقَمْنَا فِي شَقَّةٍ قَدِيمَةٍ جَمِيلَةٍ ذَاتِ جُدْرَانٍ بَيْضَاءَ وَشُرْفَةٍ تُطِلُّ عَلَى قَصْرِ الحَمْرَاءِ، فَكُنَّا نَتَنَاوَلُ الفُطُورَ كُلَّ صَبَاحٍ أَمَامَ ذٰلِكَ المَنْظَرِ الَّذِي لَا يُنْسَى، وَنُخَطِّطُ لِيَوْمِنَا بِحَمَاسٍ.</a:t>
@@ -9394,6 +9465,7 @@
                   <a:srgbClr val="1F2A37"/>
                 </a:solidFill>
                 <a:latin typeface="Amiri" pitchFamily="2" charset="-78"/>
+                <a:ea typeface="Amiri" pitchFamily="2" charset="-78"/>
                 <a:cs typeface="Amiri" pitchFamily="2" charset="-78"/>
               </a:rPr>
               <a:t>وَقَدْ أَدْهَشَنِي القَصْرُ حِينَ زُرْنَاهُ؛ فَالكِتَابَاتُ العَرَبِيَّةُ تَمْلَأُ جُدْرَانَهُ، وَاسْتَطَعْتُ أَنْ أَقْرَأَ بَعْضَهَا لِجُودِي بِصَوْتٍ عَالٍ، فَشَعَرْتُ بِفَخْرٍ لَمْ أَشْعُرْ بِهِ مِنْ قَبْلُ. أَمَّا فِي المَسَاءِ، فَكُنَّا نَتَجَوَّلُ فِي الأَسْوَاقِ، حَيْثُ اشْتَرَتْ جُودِي فُسْتَانًا أَحْمَرَ، وَاخْتَرْتُ أَنَا حَقِيبَةً جِلْدِيَّةً زَرْقَاءَ مَا زِلْتُ أَحْمِلُهَا إِلَى المَدْرَسَةِ كُلَّ يَوْمٍ.</a:t>
@@ -9413,6 +9485,7 @@
                   <a:srgbClr val="1F2A37"/>
                 </a:solidFill>
                 <a:latin typeface="Amiri" pitchFamily="2" charset="-78"/>
+                <a:ea typeface="Amiri" pitchFamily="2" charset="-78"/>
                 <a:cs typeface="Amiri" pitchFamily="2" charset="-78"/>
               </a:rPr>
               <a:t>صَحِيحٌ أَنَّ الحَرَّ كَانَ شَدِيدًا أَحْيَانًا، غَيْرَ أَنَّ الضَّحِكَ لَمْ يَتَوَقَّفْ، حَتَّى فِي أَطْوَلِ الأَيَّامِ وَأَكْثَرِهَا تَعَبًا. وَلَوْ خُيِّرْتُ بَيْنَ أَيِّ مَكَانٍ فِي العَالَمِ وَتِلْكَ الشُّرْفَةِ الصَّغِيرَةِ، لَاخْتَرْتُ الشُّرْفَةَ دُونَ تَرَدُّدٍ.</a:t>
@@ -9511,11 +9584,12 @@
               <a:buNone/>
             </a:pPr>
             <a:r>
-              <a:rPr lang="en-US" sz="950" b="1" dirty="0">
+              <a:rPr lang="ar-SA" sz="950" b="1" dirty="0">
                 <a:solidFill>
                   <a:srgbClr val="FFFFFF"/>
                 </a:solidFill>
                 <a:latin typeface="Calibri" pitchFamily="34" charset="0"/>
+                <a:ea typeface="Amiri" pitchFamily="2" charset="-78"/>
                 <a:cs typeface="Amiri" pitchFamily="2" charset="-78"/>
               </a:rPr>
               <a:t>لَمْ تَكُنْ … غَيْرَ أَنَّهَا</a:t>
@@ -9576,11 +9650,12 @@
               <a:buNone/>
             </a:pPr>
             <a:r>
-              <a:rPr lang="en-US" sz="950" b="1" dirty="0">
+              <a:rPr lang="ar-SA" sz="950" b="1" dirty="0">
                 <a:solidFill>
                   <a:srgbClr val="FFFFFF"/>
                 </a:solidFill>
                 <a:latin typeface="Calibri" pitchFamily="34" charset="0"/>
+                <a:ea typeface="Amiri" pitchFamily="2" charset="-78"/>
                 <a:cs typeface="Amiri" pitchFamily="2" charset="-78"/>
               </a:rPr>
               <a:t>ذَاتِ جُدْرَانٍ بَيْضَاءَ</a:t>
@@ -9641,11 +9716,12 @@
               <a:buNone/>
             </a:pPr>
             <a:r>
-              <a:rPr lang="en-US" sz="950" b="1" dirty="0">
+              <a:rPr lang="ar-SA" sz="950" b="1" dirty="0">
                 <a:solidFill>
                   <a:srgbClr val="FFFFFF"/>
                 </a:solidFill>
                 <a:latin typeface="Calibri" pitchFamily="34" charset="0"/>
+                <a:ea typeface="Amiri" pitchFamily="2" charset="-78"/>
                 <a:cs typeface="Amiri" pitchFamily="2" charset="-78"/>
               </a:rPr>
               <a:t>لَمْ أَشْعُرْ بِهِ مِنْ قَبْلُ</a:t>
@@ -9706,11 +9782,12 @@
               <a:buNone/>
             </a:pPr>
             <a:r>
-              <a:rPr lang="en-US" sz="950" b="1" dirty="0">
+              <a:rPr lang="ar-SA" sz="950" b="1" dirty="0">
                 <a:solidFill>
                   <a:srgbClr val="FFFFFF"/>
                 </a:solidFill>
                 <a:latin typeface="Calibri" pitchFamily="34" charset="0"/>
+                <a:ea typeface="Amiri" pitchFamily="2" charset="-78"/>
                 <a:cs typeface="Amiri" pitchFamily="2" charset="-78"/>
               </a:rPr>
               <a:t>لَوْ خُيِّرْتُ … لَاخْتَرْتُ</a:t>
@@ -9844,6 +9921,7 @@
                   <a:srgbClr val="D4AF37"/>
                 </a:solidFill>
                 <a:latin typeface="Amiri" pitchFamily="2" charset="-78"/>
+                <a:ea typeface="Amiri" pitchFamily="2" charset="-78"/>
                 <a:cs typeface="Amiri" pitchFamily="2" charset="-78"/>
               </a:rPr>
               <a:t>م</a:t>
@@ -10101,6 +10179,7 @@
                   <a:srgbClr val="8A6D1E"/>
                 </a:solidFill>
                 <a:latin typeface="Amiri" pitchFamily="2" charset="-78"/>
+                <a:ea typeface="Amiri" pitchFamily="2" charset="-78"/>
                 <a:cs typeface="Amiri" pitchFamily="2" charset="-78"/>
               </a:rPr>
               <a:t>ب</a:t>
@@ -10165,6 +10244,7 @@
                   <a:srgbClr val="1B3B6F"/>
                 </a:solidFill>
                 <a:latin typeface="Amiri" pitchFamily="2" charset="-78"/>
+                <a:ea typeface="Amiri" pitchFamily="2" charset="-78"/>
                 <a:cs typeface="Amiri" pitchFamily="2" charset="-78"/>
               </a:rPr>
               <a:t>ب</a:t>
@@ -10216,6 +10296,7 @@
                   <a:srgbClr val="8A6D1E"/>
                 </a:solidFill>
                 <a:latin typeface="Amiri" pitchFamily="2" charset="-78"/>
+                <a:ea typeface="Amiri" pitchFamily="2" charset="-78"/>
                 <a:cs typeface="Amiri" pitchFamily="2" charset="-78"/>
               </a:rPr>
               <a:t>نَمُوذَجُ الإِجَابَةِ</a:t>
@@ -10329,6 +10410,7 @@
                   <a:srgbClr val="1F2A37"/>
                 </a:solidFill>
                 <a:latin typeface="Amiri" pitchFamily="2" charset="-78"/>
+                <a:ea typeface="Amiri" pitchFamily="2" charset="-78"/>
                 <a:cs typeface="Amiri" pitchFamily="2" charset="-78"/>
               </a:rPr>
               <a:t>لِكَثِيرٍ مِنَ الشَّبَابِ اليَوْمَ مِئَاتُ "الأَصْدِقَاءِ" عَلَى الإِنْتَرْنِتِ، وَمَعَ ذٰلِكَ تَقُولُ الدِّرَاسَاتُ إِنَّهُمْ يَشْعُرُونَ بِالوَحْدَةِ أَكْثَرَ مِنْ أَيِّ جِيلٍ سَابِقٍ. فَهَلْ تُغْنِي صَدَاقَاتُ الإِنْتَرْنِتِ عَنِ الأَصْدِقَاءِ الحَقِيقِيِّينَ؟</a:t>
@@ -10348,6 +10430,7 @@
                   <a:srgbClr val="1F2A37"/>
                 </a:solidFill>
                 <a:latin typeface="Amiri" pitchFamily="2" charset="-78"/>
+                <a:ea typeface="Amiri" pitchFamily="2" charset="-78"/>
                 <a:cs typeface="Amiri" pitchFamily="2" charset="-78"/>
               </a:rPr>
               <a:t>مِنْ نَاحِيَةٍ، تُتِيحُ لَنَا الإِنْتَرْنِتُ أَنْ نَتَعَرَّفَ عَلَى أَشْخَاصٍ يُشَارِكُونَنَا هِوَايَاتٍ نَادِرَةً، كَالرَّسْمِ اليَابَانِيِّ أَوِ الشِّطْرَنْجِ، وَأَنْ نَبْقَى عَلَى اتِّصَالٍ بِأَصْدِقَاءَ انْتَقَلُوا إِلَى بُلْدَانٍ أُخْرَى، وَأَنْ نَجِدَ دَعْمًا عِنْدَمَا نَشْعُرُ بِأَنَّ لَا أَحَدَ حَوْلَنَا يَفْهَمُنَا. وَمِنْ نَاحِيَةٍ أُخْرَى، لَا يَسْتَطِيعُ الصَّدِيقُ الافْتِرَاضِيُّ أَنْ يُعَانِقَكَ حِينَ تَحْزَنُ، أَوْ يَزُورَكَ حِينَ تَمْرَضُ، أَوْ يُلَاحِظَ مِنْ وَجْهِكَ أَنَّكَ لَسْتَ بِخَيْرٍ.</a:t>
@@ -10367,6 +10450,7 @@
                   <a:srgbClr val="1F2A37"/>
                 </a:solidFill>
                 <a:latin typeface="Amiri" pitchFamily="2" charset="-78"/>
+                <a:ea typeface="Amiri" pitchFamily="2" charset="-78"/>
                 <a:cs typeface="Amiri" pitchFamily="2" charset="-78"/>
               </a:rPr>
               <a:t>وَقَدْ تَعَلَّمْتُ ذٰلِكَ عِنْدَمَا كَسَرْتُ رِجْلِي؛ فَقَدْ وَصَلَتْنِي عَشَرَاتُ الرَّسَائِلِ وَالرُّمُوزِ التَّعْبِيرِيَّةِ، غَيْرَ أَنَّ صَدِيقَتَيْنِ فَقَطْ جَاءَتَا كُلَّ يَوْمٍ بِالوَاجِبَاتِ وَالحَلَوِيَّاتِ وَالقِصَصِ المُضْحِكَةِ، حَتَّى نَسِيتُ الأَلَمَ.</a:t>
@@ -10386,6 +10470,7 @@
                   <a:srgbClr val="1F2A37"/>
                 </a:solidFill>
                 <a:latin typeface="Amiri" pitchFamily="2" charset="-78"/>
+                <a:ea typeface="Amiri" pitchFamily="2" charset="-78"/>
                 <a:cs typeface="Amiri" pitchFamily="2" charset="-78"/>
               </a:rPr>
               <a:t>لِذٰلِكَ أَرَى أَنَّ صَدَاقَاتِ الإِنْتَرْنِتِ إِضَافَةٌ جَمِيلَةٌ وَمُفِيدَةٌ لَا بَدِيلٌ. فَإِذَا اسْتَخْدَمْنَاهَا لِنُقَرِّبَ البَعِيدَ دُونَ أَنْ نُبْعِدَ القَرِيبَ، فَسَنَحْصُلُ عَلَى أَفْضَلِ مَا فِي العَالَمَيْنِ.</a:t>
@@ -10484,11 +10569,12 @@
               <a:buNone/>
             </a:pPr>
             <a:r>
-              <a:rPr lang="en-US" sz="950" b="1" dirty="0">
+              <a:rPr lang="ar-SA" sz="950" b="1" dirty="0">
                 <a:solidFill>
                   <a:srgbClr val="FFFFFF"/>
                 </a:solidFill>
                 <a:latin typeface="Calibri" pitchFamily="34" charset="0"/>
+                <a:ea typeface="Amiri" pitchFamily="2" charset="-78"/>
                 <a:cs typeface="Amiri" pitchFamily="2" charset="-78"/>
               </a:rPr>
               <a:t>وَمَعَ ذٰلِكَ تَقُولُ</a:t>
@@ -10549,11 +10635,12 @@
               <a:buNone/>
             </a:pPr>
             <a:r>
-              <a:rPr lang="en-US" sz="950" b="1" dirty="0">
+              <a:rPr lang="ar-SA" sz="950" b="1" dirty="0">
                 <a:solidFill>
                   <a:srgbClr val="FFFFFF"/>
                 </a:solidFill>
                 <a:latin typeface="Calibri" pitchFamily="34" charset="0"/>
+                <a:ea typeface="Amiri" pitchFamily="2" charset="-78"/>
                 <a:cs typeface="Amiri" pitchFamily="2" charset="-78"/>
               </a:rPr>
               <a:t>لَا يَسْتَطِيعُ … أَنْ</a:t>
@@ -10614,11 +10701,12 @@
               <a:buNone/>
             </a:pPr>
             <a:r>
-              <a:rPr lang="en-US" sz="950" b="1" dirty="0">
+              <a:rPr lang="ar-SA" sz="950" b="1" dirty="0">
                 <a:solidFill>
                   <a:srgbClr val="FFFFFF"/>
                 </a:solidFill>
                 <a:latin typeface="Calibri" pitchFamily="34" charset="0"/>
+                <a:ea typeface="Amiri" pitchFamily="2" charset="-78"/>
                 <a:cs typeface="Amiri" pitchFamily="2" charset="-78"/>
               </a:rPr>
               <a:t>صَدِيقَتَيْنِ فَقَطْ جَاءَتَا</a:t>
@@ -10679,11 +10767,12 @@
               <a:buNone/>
             </a:pPr>
             <a:r>
-              <a:rPr lang="en-US" sz="950" b="1" dirty="0">
+              <a:rPr lang="ar-SA" sz="950" b="1" dirty="0">
                 <a:solidFill>
                   <a:srgbClr val="FFFFFF"/>
                 </a:solidFill>
                 <a:latin typeface="Calibri" pitchFamily="34" charset="0"/>
+                <a:ea typeface="Amiri" pitchFamily="2" charset="-78"/>
                 <a:cs typeface="Amiri" pitchFamily="2" charset="-78"/>
               </a:rPr>
               <a:t>إِضَافَةٌ … لَا بَدِيلٌ</a:t>
@@ -10817,6 +10906,7 @@
                   <a:srgbClr val="D4AF37"/>
                 </a:solidFill>
                 <a:latin typeface="Amiri" pitchFamily="2" charset="-78"/>
+                <a:ea typeface="Amiri" pitchFamily="2" charset="-78"/>
                 <a:cs typeface="Amiri" pitchFamily="2" charset="-78"/>
               </a:rPr>
               <a:t>م</a:t>
@@ -11137,6 +11227,7 @@
                   <a:srgbClr val="8A6D1E"/>
                 </a:solidFill>
                 <a:latin typeface="Amiri" pitchFamily="2" charset="-78"/>
+                <a:ea typeface="Amiri" pitchFamily="2" charset="-78"/>
                 <a:cs typeface="Amiri" pitchFamily="2" charset="-78"/>
               </a:rPr>
               <a:t>قَيِّمْ عَمَلَكَ</a:t>
@@ -12381,6 +12472,7 @@
                   <a:srgbClr val="FFFFFF"/>
                 </a:solidFill>
                 <a:latin typeface="Amiri" pitchFamily="2" charset="-78"/>
+                <a:ea typeface="Amiri" pitchFamily="2" charset="-78"/>
                 <a:cs typeface="Amiri" pitchFamily="2" charset="-78"/>
               </a:rPr>
               <a:t>أَحْسَنْتُمْ! إِلَى اللِّقَاءِ</a:t>
@@ -12533,6 +12625,7 @@
                   <a:srgbClr val="D4AF37"/>
                 </a:solidFill>
                 <a:latin typeface="Amiri" pitchFamily="2" charset="-78"/>
+                <a:ea typeface="Amiri" pitchFamily="2" charset="-78"/>
                 <a:cs typeface="Amiri" pitchFamily="2" charset="-78"/>
               </a:rPr>
               <a:t>وَرْشَةُ التَّدْرِيبِ</a:t>
@@ -12666,6 +12759,7 @@
                   <a:srgbClr val="D4AF37"/>
                 </a:solidFill>
                 <a:latin typeface="Amiri" pitchFamily="2" charset="-78"/>
+                <a:ea typeface="Amiri" pitchFamily="2" charset="-78"/>
                 <a:cs typeface="Amiri" pitchFamily="2" charset="-78"/>
               </a:rPr>
               <a:t>م</a:t>
@@ -12986,6 +13080,7 @@
                   <a:srgbClr val="8A6D1E"/>
                 </a:solidFill>
                 <a:latin typeface="Amiri" pitchFamily="2" charset="-78"/>
+                <a:ea typeface="Amiri" pitchFamily="2" charset="-78"/>
                 <a:cs typeface="Amiri" pitchFamily="2" charset="-78"/>
               </a:rPr>
               <a:t>آدَابُ الصَّفِّ</a:t>
@@ -14517,6 +14612,7 @@
                   <a:srgbClr val="D4AF37"/>
                 </a:solidFill>
                 <a:latin typeface="Amiri" pitchFamily="2" charset="-78"/>
+                <a:ea typeface="Amiri" pitchFamily="2" charset="-78"/>
                 <a:cs typeface="Amiri" pitchFamily="2" charset="-78"/>
               </a:rPr>
               <a:t>م</a:t>
@@ -14837,6 +14933,7 @@
                   <a:srgbClr val="8A6D1E"/>
                 </a:solidFill>
                 <a:latin typeface="Amiri" pitchFamily="2" charset="-78"/>
+                <a:ea typeface="Amiri" pitchFamily="2" charset="-78"/>
                 <a:cs typeface="Amiri" pitchFamily="2" charset="-78"/>
               </a:rPr>
               <a:t>خَرِيطَةُ الوَرْشَةِ</a:t>
@@ -15151,6 +15248,7 @@
                   <a:srgbClr val="1B3B6F"/>
                 </a:solidFill>
                 <a:latin typeface="Amiri" pitchFamily="2" charset="-78"/>
+                <a:ea typeface="Amiri" pitchFamily="2" charset="-78"/>
                 <a:cs typeface="Amiri" pitchFamily="2" charset="-78"/>
               </a:rPr>
               <a:t>كَيْفَ</a:t>
@@ -15427,6 +15525,7 @@
                   <a:srgbClr val="1E6B52"/>
                 </a:solidFill>
                 <a:latin typeface="Amiri" pitchFamily="2" charset="-78"/>
+                <a:ea typeface="Amiri" pitchFamily="2" charset="-78"/>
                 <a:cs typeface="Amiri" pitchFamily="2" charset="-78"/>
               </a:rPr>
               <a:t>الاسْتِمَارَةُ</a:t>
@@ -15703,6 +15802,7 @@
                   <a:srgbClr val="1E6B52"/>
                 </a:solidFill>
                 <a:latin typeface="Amiri" pitchFamily="2" charset="-78"/>
+                <a:ea typeface="Amiri" pitchFamily="2" charset="-78"/>
                 <a:cs typeface="Amiri" pitchFamily="2" charset="-78"/>
               </a:rPr>
               <a:t>الرِّسَالَةُ</a:t>
@@ -15979,6 +16079,7 @@
                   <a:srgbClr val="1E6B52"/>
                 </a:solidFill>
                 <a:latin typeface="Amiri" pitchFamily="2" charset="-78"/>
+                <a:ea typeface="Amiri" pitchFamily="2" charset="-78"/>
                 <a:cs typeface="Amiri" pitchFamily="2" charset="-78"/>
               </a:rPr>
               <a:t>المَقَالُ</a:t>
@@ -16255,6 +16356,7 @@
                   <a:srgbClr val="8A6D1E"/>
                 </a:solidFill>
                 <a:latin typeface="Amiri" pitchFamily="2" charset="-78"/>
+                <a:ea typeface="Amiri" pitchFamily="2" charset="-78"/>
                 <a:cs typeface="Amiri" pitchFamily="2" charset="-78"/>
               </a:rPr>
               <a:t>قَيِّمْ</a:t>
@@ -16498,6 +16600,7 @@
                   <a:srgbClr val="D4AF37"/>
                 </a:solidFill>
                 <a:latin typeface="Amiri" pitchFamily="2" charset="-78"/>
+                <a:ea typeface="Amiri" pitchFamily="2" charset="-78"/>
                 <a:cs typeface="Amiri" pitchFamily="2" charset="-78"/>
               </a:rPr>
               <a:t>م</a:t>
@@ -16818,6 +16921,7 @@
                   <a:srgbClr val="8A6D1E"/>
                 </a:solidFill>
                 <a:latin typeface="Amiri" pitchFamily="2" charset="-78"/>
+                <a:ea typeface="Amiri" pitchFamily="2" charset="-78"/>
                 <a:cs typeface="Amiri" pitchFamily="2" charset="-78"/>
               </a:rPr>
               <a:t>امْتِحَانُ الكِتَابَةِ</a:t>
@@ -17442,6 +17546,7 @@
                   <a:srgbClr val="1B3B6F"/>
                 </a:solidFill>
                 <a:latin typeface="Amiri" pitchFamily="2" charset="-78"/>
+                <a:ea typeface="Amiri" pitchFamily="2" charset="-78"/>
                 <a:cs typeface="Amiri" pitchFamily="2" charset="-78"/>
               </a:rPr>
               <a:t>البَيْتُ أَكْبَرُ مِنْ بَيْتِنَا القَدِيمِ</a:t>
@@ -17541,6 +17646,7 @@
                   <a:srgbClr val="1B3B6F"/>
                 </a:solidFill>
                 <a:latin typeface="Amiri" pitchFamily="2" charset="-78"/>
+                <a:ea typeface="Amiri" pitchFamily="2" charset="-78"/>
                 <a:cs typeface="Amiri" pitchFamily="2" charset="-78"/>
               </a:rPr>
               <a:t>غُرْفَتِي وَاسِعَةٌ، وَجُدْرَانُهَا زَرْقَاءُ</a:t>
@@ -17640,6 +17746,7 @@
                   <a:srgbClr val="1B3B6F"/>
                 </a:solidFill>
                 <a:latin typeface="Amiri" pitchFamily="2" charset="-78"/>
+                <a:ea typeface="Amiri" pitchFamily="2" charset="-78"/>
                 <a:cs typeface="Amiri" pitchFamily="2" charset="-78"/>
               </a:rPr>
               <a:t>هَلْ تُرِيدِينَ أَنْ تَأْتِي؟</a:t>
@@ -17811,6 +17918,7 @@
                   <a:srgbClr val="D4AF37"/>
                 </a:solidFill>
                 <a:latin typeface="Amiri" pitchFamily="2" charset="-78"/>
+                <a:ea typeface="Amiri" pitchFamily="2" charset="-78"/>
                 <a:cs typeface="Amiri" pitchFamily="2" charset="-78"/>
               </a:rPr>
               <a:t>م</a:t>
@@ -18131,6 +18239,7 @@
                   <a:srgbClr val="8A6D1E"/>
                 </a:solidFill>
                 <a:latin typeface="Amiri" pitchFamily="2" charset="-78"/>
+                <a:ea typeface="Amiri" pitchFamily="2" charset="-78"/>
                 <a:cs typeface="Amiri" pitchFamily="2" charset="-78"/>
               </a:rPr>
               <a:t>اسْتِمَارَةُ الاشْتِرَاكِ فِي نَادِي الشَّبَابِ</a:t>
@@ -18487,6 +18596,7 @@
                   <a:srgbClr val="1B3B6F"/>
                 </a:solidFill>
                 <a:latin typeface="Amiri" pitchFamily="2" charset="-78"/>
+                <a:ea typeface="Amiri" pitchFamily="2" charset="-78"/>
                 <a:cs typeface="Amiri" pitchFamily="2" charset="-78"/>
               </a:rPr>
               <a:t>الاسْمُ</a:t>
@@ -18731,6 +18841,7 @@
                   <a:srgbClr val="1B3B6F"/>
                 </a:solidFill>
                 <a:latin typeface="Amiri" pitchFamily="2" charset="-78"/>
+                <a:ea typeface="Amiri" pitchFamily="2" charset="-78"/>
                 <a:cs typeface="Amiri" pitchFamily="2" charset="-78"/>
               </a:rPr>
               <a:t>العُمْرُ</a:t>
@@ -18975,6 +19086,7 @@
                   <a:srgbClr val="1B3B6F"/>
                 </a:solidFill>
                 <a:latin typeface="Amiri" pitchFamily="2" charset="-78"/>
+                <a:ea typeface="Amiri" pitchFamily="2" charset="-78"/>
                 <a:cs typeface="Amiri" pitchFamily="2" charset="-78"/>
               </a:rPr>
               <a:t>العُنْوَانُ</a:t>
@@ -19219,6 +19331,7 @@
                   <a:srgbClr val="1B3B6F"/>
                 </a:solidFill>
                 <a:latin typeface="Amiri" pitchFamily="2" charset="-78"/>
+                <a:ea typeface="Amiri" pitchFamily="2" charset="-78"/>
                 <a:cs typeface="Amiri" pitchFamily="2" charset="-78"/>
               </a:rPr>
               <a:t>عَدَدُ الإِخْوَةِ وَالأَخَوَاتِ</a:t>
@@ -19463,6 +19576,7 @@
                   <a:srgbClr val="1B3B6F"/>
                 </a:solidFill>
                 <a:latin typeface="Amiri" pitchFamily="2" charset="-78"/>
+                <a:ea typeface="Amiri" pitchFamily="2" charset="-78"/>
                 <a:cs typeface="Amiri" pitchFamily="2" charset="-78"/>
               </a:rPr>
               <a:t>الهِوَايَاتُ</a:t>
@@ -19707,6 +19821,7 @@
                   <a:srgbClr val="1B3B6F"/>
                 </a:solidFill>
                 <a:latin typeface="Amiri" pitchFamily="2" charset="-78"/>
+                <a:ea typeface="Amiri" pitchFamily="2" charset="-78"/>
                 <a:cs typeface="Amiri" pitchFamily="2" charset="-78"/>
               </a:rPr>
               <a:t>صِفَتَانِ شَخْصِيَّتَانِ</a:t>
@@ -19951,6 +20066,7 @@
                   <a:srgbClr val="1B3B6F"/>
                 </a:solidFill>
                 <a:latin typeface="Amiri" pitchFamily="2" charset="-78"/>
+                <a:ea typeface="Amiri" pitchFamily="2" charset="-78"/>
                 <a:cs typeface="Amiri" pitchFamily="2" charset="-78"/>
               </a:rPr>
               <a:t>نَشَاطٌ تُرِيدِينَ أَنْ تُجَرِّبِيهِ</a:t>
@@ -20130,6 +20246,7 @@
                   <a:srgbClr val="1B3B6F"/>
                 </a:solidFill>
                 <a:latin typeface="Amiri" pitchFamily="2" charset="-78"/>
+                <a:ea typeface="Amiri" pitchFamily="2" charset="-78"/>
                 <a:cs typeface="Amiri" pitchFamily="2" charset="-78"/>
               </a:rPr>
               <a:t>جُمْلَةٌ: مَاذَا فَعَلْتِ فِي آخِرِ عُطْلَةٍ؟</a:t>
@@ -20339,6 +20456,7 @@
                   <a:srgbClr val="D4AF37"/>
                 </a:solidFill>
                 <a:latin typeface="Amiri" pitchFamily="2" charset="-78"/>
+                <a:ea typeface="Amiri" pitchFamily="2" charset="-78"/>
                 <a:cs typeface="Amiri" pitchFamily="2" charset="-78"/>
               </a:rPr>
               <a:t>م</a:t>
@@ -20659,6 +20777,7 @@
                   <a:srgbClr val="8A6D1E"/>
                 </a:solidFill>
                 <a:latin typeface="Amiri" pitchFamily="2" charset="-78"/>
+                <a:ea typeface="Amiri" pitchFamily="2" charset="-78"/>
                 <a:cs typeface="Amiri" pitchFamily="2" charset="-78"/>
               </a:rPr>
               <a:t>نَمُوذَجُ الإِجَابَةِ</a:t>
@@ -20977,6 +21096,7 @@
                   <a:srgbClr val="1B3B6F"/>
                 </a:solidFill>
                 <a:latin typeface="Amiri" pitchFamily="2" charset="-78"/>
+                <a:ea typeface="Amiri" pitchFamily="2" charset="-78"/>
                 <a:cs typeface="Amiri" pitchFamily="2" charset="-78"/>
               </a:rPr>
               <a:t>نَادِيَةُ عَلِيٍّ</a:t>
@@ -21015,6 +21135,7 @@
                   <a:srgbClr val="1B3B6F"/>
                 </a:solidFill>
                 <a:latin typeface="Amiri" pitchFamily="2" charset="-78"/>
+                <a:ea typeface="Amiri" pitchFamily="2" charset="-78"/>
                 <a:cs typeface="Amiri" pitchFamily="2" charset="-78"/>
               </a:rPr>
               <a:t>الاسْمُ</a:t>
@@ -21156,6 +21277,7 @@
                   <a:srgbClr val="1B3B6F"/>
                 </a:solidFill>
                 <a:latin typeface="Amiri" pitchFamily="2" charset="-78"/>
+                <a:ea typeface="Amiri" pitchFamily="2" charset="-78"/>
                 <a:cs typeface="Amiri" pitchFamily="2" charset="-78"/>
               </a:rPr>
               <a:t>خَمْسَ عَشْرَةَ سَنَةً</a:t>
@@ -21194,6 +21316,7 @@
                   <a:srgbClr val="1B3B6F"/>
                 </a:solidFill>
                 <a:latin typeface="Amiri" pitchFamily="2" charset="-78"/>
+                <a:ea typeface="Amiri" pitchFamily="2" charset="-78"/>
                 <a:cs typeface="Amiri" pitchFamily="2" charset="-78"/>
               </a:rPr>
               <a:t>العُمْرُ</a:t>
@@ -21335,6 +21458,7 @@
                   <a:srgbClr val="1B3B6F"/>
                 </a:solidFill>
                 <a:latin typeface="Amiri" pitchFamily="2" charset="-78"/>
+                <a:ea typeface="Amiri" pitchFamily="2" charset="-78"/>
                 <a:cs typeface="Amiri" pitchFamily="2" charset="-78"/>
               </a:rPr>
               <a:t>شَارِعُ الحَدِيقَةِ، رَقْمُ ١٢</a:t>
@@ -21373,6 +21497,7 @@
                   <a:srgbClr val="1B3B6F"/>
                 </a:solidFill>
                 <a:latin typeface="Amiri" pitchFamily="2" charset="-78"/>
+                <a:ea typeface="Amiri" pitchFamily="2" charset="-78"/>
                 <a:cs typeface="Amiri" pitchFamily="2" charset="-78"/>
               </a:rPr>
               <a:t>العُنْوَانُ</a:t>
@@ -21514,6 +21639,7 @@
                   <a:srgbClr val="1B3B6F"/>
                 </a:solidFill>
                 <a:latin typeface="Amiri" pitchFamily="2" charset="-78"/>
+                <a:ea typeface="Amiri" pitchFamily="2" charset="-78"/>
                 <a:cs typeface="Amiri" pitchFamily="2" charset="-78"/>
               </a:rPr>
               <a:t>أُخْتٌ وَأَخَوَانِ</a:t>
@@ -21552,6 +21678,7 @@
                   <a:srgbClr val="1B3B6F"/>
                 </a:solidFill>
                 <a:latin typeface="Amiri" pitchFamily="2" charset="-78"/>
+                <a:ea typeface="Amiri" pitchFamily="2" charset="-78"/>
                 <a:cs typeface="Amiri" pitchFamily="2" charset="-78"/>
               </a:rPr>
               <a:t>عَدَدُ الإِخْوَةِ وَالأَخَوَاتِ</a:t>
@@ -21693,6 +21820,7 @@
                   <a:srgbClr val="1B3B6F"/>
                 </a:solidFill>
                 <a:latin typeface="Amiri" pitchFamily="2" charset="-78"/>
+                <a:ea typeface="Amiri" pitchFamily="2" charset="-78"/>
                 <a:cs typeface="Amiri" pitchFamily="2" charset="-78"/>
               </a:rPr>
               <a:t>الرَّسْمُ وَكُرَةُ الشَّبَكَةِ</a:t>
@@ -21731,6 +21859,7 @@
                   <a:srgbClr val="1B3B6F"/>
                 </a:solidFill>
                 <a:latin typeface="Amiri" pitchFamily="2" charset="-78"/>
+                <a:ea typeface="Amiri" pitchFamily="2" charset="-78"/>
                 <a:cs typeface="Amiri" pitchFamily="2" charset="-78"/>
               </a:rPr>
               <a:t>الهِوَايَاتُ</a:t>
@@ -21872,6 +22001,7 @@
                   <a:srgbClr val="1B3B6F"/>
                 </a:solidFill>
                 <a:latin typeface="Amiri" pitchFamily="2" charset="-78"/>
+                <a:ea typeface="Amiri" pitchFamily="2" charset="-78"/>
                 <a:cs typeface="Amiri" pitchFamily="2" charset="-78"/>
               </a:rPr>
               <a:t>مَرِحَةٌ وَصَبُورَةٌ</a:t>
@@ -21910,6 +22040,7 @@
                   <a:srgbClr val="1B3B6F"/>
                 </a:solidFill>
                 <a:latin typeface="Amiri" pitchFamily="2" charset="-78"/>
+                <a:ea typeface="Amiri" pitchFamily="2" charset="-78"/>
                 <a:cs typeface="Amiri" pitchFamily="2" charset="-78"/>
               </a:rPr>
               <a:t>صِفَتَانِ شَخْصِيَّتَانِ</a:t>
@@ -22051,6 +22182,7 @@
                   <a:srgbClr val="1B3B6F"/>
                 </a:solidFill>
                 <a:latin typeface="Amiri" pitchFamily="2" charset="-78"/>
+                <a:ea typeface="Amiri" pitchFamily="2" charset="-78"/>
                 <a:cs typeface="Amiri" pitchFamily="2" charset="-78"/>
               </a:rPr>
               <a:t>المَسْرَحُ</a:t>
@@ -22089,6 +22221,7 @@
                   <a:srgbClr val="1B3B6F"/>
                 </a:solidFill>
                 <a:latin typeface="Amiri" pitchFamily="2" charset="-78"/>
+                <a:ea typeface="Amiri" pitchFamily="2" charset="-78"/>
                 <a:cs typeface="Amiri" pitchFamily="2" charset="-78"/>
               </a:rPr>
               <a:t>نَشَاطٌ تُرِيدِينَ أَنْ تُجَرِّبِيهِ</a:t>
@@ -22230,6 +22363,7 @@
                   <a:srgbClr val="1B3B6F"/>
                 </a:solidFill>
                 <a:latin typeface="Amiri" pitchFamily="2" charset="-78"/>
+                <a:ea typeface="Amiri" pitchFamily="2" charset="-78"/>
                 <a:cs typeface="Amiri" pitchFamily="2" charset="-78"/>
               </a:rPr>
               <a:t>سَافَرْتُ إِلَى إِسْبَانْيَا مَعَ عَائِلَتِي، وَزُرْنَا قَصْرَ الحَمْرَاءِ.</a:t>
@@ -22268,6 +22402,7 @@
                   <a:srgbClr val="1B3B6F"/>
                 </a:solidFill>
                 <a:latin typeface="Amiri" pitchFamily="2" charset="-78"/>
+                <a:ea typeface="Amiri" pitchFamily="2" charset="-78"/>
                 <a:cs typeface="Amiri" pitchFamily="2" charset="-78"/>
               </a:rPr>
               <a:t>جُمْلَةٌ: مَاذَا فَعَلْتِ فِي آخِرِ عُطْلَةٍ؟</a:t>
@@ -22477,6 +22612,7 @@
                   <a:srgbClr val="D4AF37"/>
                 </a:solidFill>
                 <a:latin typeface="Amiri" pitchFamily="2" charset="-78"/>
+                <a:ea typeface="Amiri" pitchFamily="2" charset="-78"/>
                 <a:cs typeface="Amiri" pitchFamily="2" charset="-78"/>
               </a:rPr>
               <a:t>م</a:t>
@@ -22797,6 +22933,7 @@
                   <a:srgbClr val="8A6D1E"/>
                 </a:solidFill>
                 <a:latin typeface="Amiri" pitchFamily="2" charset="-78"/>
+                <a:ea typeface="Amiri" pitchFamily="2" charset="-78"/>
                 <a:cs typeface="Amiri" pitchFamily="2" charset="-78"/>
               </a:rPr>
               <a:t>بَيْتُنَا الجَدِيدُ</a:t>
@@ -23272,6 +23409,7 @@
                   <a:srgbClr val="1B3B6F"/>
                 </a:solidFill>
                 <a:latin typeface="Amiri" pitchFamily="2" charset="-78"/>
+                <a:ea typeface="Amiri" pitchFamily="2" charset="-78"/>
                 <a:cs typeface="Amiri" pitchFamily="2" charset="-78"/>
               </a:rPr>
               <a:t>انْتَقَلْنَا إِلَى بَيْتٍ جَدِيدٍ …</a:t>
@@ -23348,6 +23486,7 @@
                   <a:srgbClr val="1B3B6F"/>
                 </a:solidFill>
                 <a:latin typeface="Amiri" pitchFamily="2" charset="-78"/>
+                <a:ea typeface="Amiri" pitchFamily="2" charset="-78"/>
                 <a:cs typeface="Amiri" pitchFamily="2" charset="-78"/>
               </a:rPr>
               <a:t>البَيْتُ أَكْبَرُ مِنْ … ، وَفِيهِ …</a:t>
@@ -23424,6 +23563,7 @@
                   <a:srgbClr val="1B3B6F"/>
                 </a:solidFill>
                 <a:latin typeface="Amiri" pitchFamily="2" charset="-78"/>
+                <a:ea typeface="Amiri" pitchFamily="2" charset="-78"/>
                 <a:cs typeface="Amiri" pitchFamily="2" charset="-78"/>
               </a:rPr>
               <a:t>فِيهَا سَرِيرٌ … بِجَانِبِ …</a:t>
@@ -23500,6 +23640,7 @@
                   <a:srgbClr val="1B3B6F"/>
                 </a:solidFill>
                 <a:latin typeface="Amiri" pitchFamily="2" charset="-78"/>
+                <a:ea typeface="Amiri" pitchFamily="2" charset="-78"/>
                 <a:cs typeface="Amiri" pitchFamily="2" charset="-78"/>
               </a:rPr>
               <a:t>هَلْ تُرِيدِينَ أَنْ تَأْتِي … ؟</a:t>
@@ -23671,6 +23812,7 @@
                   <a:srgbClr val="D4AF37"/>
                 </a:solidFill>
                 <a:latin typeface="Amiri" pitchFamily="2" charset="-78"/>
+                <a:ea typeface="Amiri" pitchFamily="2" charset="-78"/>
                 <a:cs typeface="Amiri" pitchFamily="2" charset="-78"/>
               </a:rPr>
               <a:t>م</a:t>
@@ -23991,6 +24133,7 @@
                   <a:srgbClr val="8A6D1E"/>
                 </a:solidFill>
                 <a:latin typeface="Amiri" pitchFamily="2" charset="-78"/>
+                <a:ea typeface="Amiri" pitchFamily="2" charset="-78"/>
                 <a:cs typeface="Amiri" pitchFamily="2" charset="-78"/>
               </a:rPr>
               <a:t>نَصُّ السُّؤَالِ</a:t>
@@ -24271,6 +24414,7 @@
                   <a:srgbClr val="1B3B6F"/>
                 </a:solidFill>
                 <a:latin typeface="Amiri" pitchFamily="2" charset="-78"/>
+                <a:ea typeface="Amiri" pitchFamily="2" charset="-78"/>
                 <a:cs typeface="Amiri" pitchFamily="2" charset="-78"/>
               </a:rPr>
               <a:t>اكْتُبِي رِسَالَةً إِلَى صَدِيقَتِكِ عَنْ بَيْتِكِ الجَدِيدِ (٨٠–٩٠ كَلِمَةً).</a:t>
@@ -24412,6 +24556,7 @@
                   <a:srgbClr val="1B3B6F"/>
                 </a:solidFill>
                 <a:latin typeface="Amiri" pitchFamily="2" charset="-78"/>
+                <a:ea typeface="Amiri" pitchFamily="2" charset="-78"/>
                 <a:cs typeface="Amiri" pitchFamily="2" charset="-78"/>
               </a:rPr>
               <a:t>مَتَى انْتَقَلْتُمْ؟ صِفِي البَيْتَ الجَدِيدَ.</a:t>
@@ -24553,6 +24698,7 @@
                   <a:srgbClr val="1B3B6F"/>
                 </a:solidFill>
                 <a:latin typeface="Amiri" pitchFamily="2" charset="-78"/>
+                <a:ea typeface="Amiri" pitchFamily="2" charset="-78"/>
                 <a:cs typeface="Amiri" pitchFamily="2" charset="-78"/>
               </a:rPr>
               <a:t>صِفِي غُرْفَتَكِ.</a:t>
@@ -24694,6 +24840,7 @@
                   <a:srgbClr val="1B3B6F"/>
                 </a:solidFill>
                 <a:latin typeface="Amiri" pitchFamily="2" charset="-78"/>
+                <a:ea typeface="Amiri" pitchFamily="2" charset="-78"/>
                 <a:cs typeface="Amiri" pitchFamily="2" charset="-78"/>
               </a:rPr>
               <a:t>مَا رَأْيُكِ فِي البَيْتِ؟</a:t>
@@ -24835,6 +24982,7 @@
                   <a:srgbClr val="1B3B6F"/>
                 </a:solidFill>
                 <a:latin typeface="Amiri" pitchFamily="2" charset="-78"/>
+                <a:ea typeface="Amiri" pitchFamily="2" charset="-78"/>
                 <a:cs typeface="Amiri" pitchFamily="2" charset="-78"/>
               </a:rPr>
               <a:t>اُدْعِي صَدِيقَتَكِ إِلَى البَيْتِ، وَحَدِّدِي اليَوْمَ وَالوَقْتَ.</a:t>
@@ -25044,6 +25192,7 @@
                   <a:srgbClr val="D4AF37"/>
                 </a:solidFill>
                 <a:latin typeface="Amiri" pitchFamily="2" charset="-78"/>
+                <a:ea typeface="Amiri" pitchFamily="2" charset="-78"/>
                 <a:cs typeface="Amiri" pitchFamily="2" charset="-78"/>
               </a:rPr>
               <a:t>م</a:t>
@@ -25364,6 +25513,7 @@
                   <a:srgbClr val="8A6D1E"/>
                 </a:solidFill>
                 <a:latin typeface="Amiri" pitchFamily="2" charset="-78"/>
+                <a:ea typeface="Amiri" pitchFamily="2" charset="-78"/>
                 <a:cs typeface="Amiri" pitchFamily="2" charset="-78"/>
               </a:rPr>
               <a:t>قَوَالِبُ الكِتَابَةِ</a:t>
@@ -25644,6 +25794,7 @@
                   <a:srgbClr val="1B3B6F"/>
                 </a:solidFill>
                 <a:latin typeface="Amiri" pitchFamily="2" charset="-78"/>
+                <a:ea typeface="Amiri" pitchFamily="2" charset="-78"/>
                 <a:cs typeface="Amiri" pitchFamily="2" charset="-78"/>
               </a:rPr>
               <a:t>مَرْحَبًا يَا ______ ، كَيْفَ حَالُكِ؟</a:t>
@@ -25850,6 +26001,7 @@
                   <a:srgbClr val="1B3B6F"/>
                 </a:solidFill>
                 <a:latin typeface="Amiri" pitchFamily="2" charset="-78"/>
+                <a:ea typeface="Amiri" pitchFamily="2" charset="-78"/>
                 <a:cs typeface="Amiri" pitchFamily="2" charset="-78"/>
               </a:rPr>
               <a:t>انْتَقَلْنَا إِلَى بَيْتٍ جَدِيدٍ ______ . البَيْتُ ______ .</a:t>
@@ -26056,6 +26208,7 @@
                   <a:srgbClr val="1B3B6F"/>
                 </a:solidFill>
                 <a:latin typeface="Amiri" pitchFamily="2" charset="-78"/>
+                <a:ea typeface="Amiri" pitchFamily="2" charset="-78"/>
                 <a:cs typeface="Amiri" pitchFamily="2" charset="-78"/>
               </a:rPr>
               <a:t>غُرْفَتِي ______ ، وَجُدْرَانُهَا ______ . فِيهَا ______ بِجَانِبِ ______ .</a:t>
@@ -26262,6 +26415,7 @@
                   <a:srgbClr val="1B3B6F"/>
                 </a:solidFill>
                 <a:latin typeface="Amiri" pitchFamily="2" charset="-78"/>
+                <a:ea typeface="Amiri" pitchFamily="2" charset="-78"/>
                 <a:cs typeface="Amiri" pitchFamily="2" charset="-78"/>
               </a:rPr>
               <a:t>أُحِبُّ البَيْتَ، لٰكِنَّهُ ______ .</a:t>
@@ -26468,6 +26622,7 @@
                   <a:srgbClr val="1B3B6F"/>
                 </a:solidFill>
                 <a:latin typeface="Amiri" pitchFamily="2" charset="-78"/>
+                <a:ea typeface="Amiri" pitchFamily="2" charset="-78"/>
                 <a:cs typeface="Amiri" pitchFamily="2" charset="-78"/>
               </a:rPr>
               <a:t>يَوْمَ ______ سَنُنَظِّمُ ______ . هَلْ تُرِيدِينَ أَنْ تَأْتِي؟</a:t>
@@ -26674,6 +26829,7 @@
                   <a:srgbClr val="1B3B6F"/>
                 </a:solidFill>
                 <a:latin typeface="Amiri" pitchFamily="2" charset="-78"/>
+                <a:ea typeface="Amiri" pitchFamily="2" charset="-78"/>
                 <a:cs typeface="Amiri" pitchFamily="2" charset="-78"/>
               </a:rPr>
               <a:t>مَعَ السَّلَامَةِ، ______</a:t>
@@ -26913,13 +27069,9 @@
     <a:fontScheme name="Office">
       <a:majorFont>
         <a:latin typeface="Calibri Light" panose="020F0302020204030204"/>
-        <a:ea typeface=""/>
-        <a:cs typeface=""/>
-        <a:font script="Jpan" typeface="游ゴシック Light"/>
-        <a:font script="Hang" typeface="맑은 고딕"/>
-        <a:font script="Hans" typeface="等线 Light"/>
-        <a:font script="Hant" typeface="新細明體"/>
-        <a:font script="Arab" typeface="Times New Roman"/>
+        <a:ea typeface="Amiri" pitchFamily="2" charset="-78"/>
+        <a:cs typeface="Amiri" pitchFamily="2" charset="-78"/>
+        <a:font script="Arab" typeface="Amiri"/>
         <a:font script="Hebr" typeface="Times New Roman"/>
         <a:font script="Thai" typeface="Angsana New"/>
         <a:font script="Ethi" typeface="Nyala"/>
@@ -26965,13 +27117,9 @@
       </a:majorFont>
       <a:minorFont>
         <a:latin typeface="Calibri" panose="020F0502020204030204"/>
-        <a:ea typeface=""/>
-        <a:cs typeface=""/>
-        <a:font script="Jpan" typeface="游ゴシック"/>
-        <a:font script="Hang" typeface="맑은 고딕"/>
-        <a:font script="Hans" typeface="等线"/>
-        <a:font script="Hant" typeface="新細明體"/>
-        <a:font script="Arab" typeface="Arial"/>
+        <a:ea typeface="Amiri" pitchFamily="2" charset="-78"/>
+        <a:cs typeface="Amiri" pitchFamily="2" charset="-78"/>
+        <a:font script="Arab" typeface="Amiri"/>
         <a:font script="Hebr" typeface="Arial"/>
         <a:font script="Thai" typeface="Cordia New"/>
         <a:font script="Ethi" typeface="Nyala"/>

--- a/Final_Revision/Exam_Practice/FR-L02_Writing_Workshop_People_Home_and_Free_Time.pptx
+++ b/Final_Revision/Exam_Practice/FR-L02_Writing_Workshop_People_Home_and_Free_Time.pptx
@@ -3852,7 +3852,7 @@
                 <a:solidFill>
                   <a:srgbClr val="FFFFFF"/>
                 </a:solidFill>
-                <a:latin typeface="Calibri" pitchFamily="34" charset="0"/>
+                <a:latin typeface="Amiri" pitchFamily="2" charset="-78"/>
                 <a:ea typeface="Amiri" pitchFamily="2" charset="-78"/>
                 <a:cs typeface="Amiri" pitchFamily="2" charset="-78"/>
               </a:rPr>
@@ -3918,7 +3918,7 @@
                 <a:solidFill>
                   <a:srgbClr val="FFFFFF"/>
                 </a:solidFill>
-                <a:latin typeface="Calibri" pitchFamily="34" charset="0"/>
+                <a:latin typeface="Amiri" pitchFamily="2" charset="-78"/>
                 <a:ea typeface="Amiri" pitchFamily="2" charset="-78"/>
                 <a:cs typeface="Amiri" pitchFamily="2" charset="-78"/>
               </a:rPr>
@@ -3984,7 +3984,7 @@
                 <a:solidFill>
                   <a:srgbClr val="FFFFFF"/>
                 </a:solidFill>
-                <a:latin typeface="Calibri" pitchFamily="34" charset="0"/>
+                <a:latin typeface="Amiri" pitchFamily="2" charset="-78"/>
                 <a:ea typeface="Amiri" pitchFamily="2" charset="-78"/>
                 <a:cs typeface="Amiri" pitchFamily="2" charset="-78"/>
               </a:rPr>
@@ -4050,7 +4050,7 @@
                 <a:solidFill>
                   <a:srgbClr val="FFFFFF"/>
                 </a:solidFill>
-                <a:latin typeface="Calibri" pitchFamily="34" charset="0"/>
+                <a:latin typeface="Amiri" pitchFamily="2" charset="-78"/>
                 <a:ea typeface="Amiri" pitchFamily="2" charset="-78"/>
                 <a:cs typeface="Amiri" pitchFamily="2" charset="-78"/>
               </a:rPr>
@@ -4848,7 +4848,7 @@
                 <a:solidFill>
                   <a:srgbClr val="FFFFFF"/>
                 </a:solidFill>
-                <a:latin typeface="Calibri" pitchFamily="34" charset="0"/>
+                <a:latin typeface="Amiri" pitchFamily="2" charset="-78"/>
                 <a:ea typeface="Amiri" pitchFamily="2" charset="-78"/>
                 <a:cs typeface="Amiri" pitchFamily="2" charset="-78"/>
               </a:rPr>
@@ -4914,7 +4914,7 @@
                 <a:solidFill>
                   <a:srgbClr val="FFFFFF"/>
                 </a:solidFill>
-                <a:latin typeface="Calibri" pitchFamily="34" charset="0"/>
+                <a:latin typeface="Amiri" pitchFamily="2" charset="-78"/>
                 <a:ea typeface="Amiri" pitchFamily="2" charset="-78"/>
                 <a:cs typeface="Amiri" pitchFamily="2" charset="-78"/>
               </a:rPr>
@@ -4980,7 +4980,7 @@
                 <a:solidFill>
                   <a:srgbClr val="FFFFFF"/>
                 </a:solidFill>
-                <a:latin typeface="Calibri" pitchFamily="34" charset="0"/>
+                <a:latin typeface="Amiri" pitchFamily="2" charset="-78"/>
                 <a:ea typeface="Amiri" pitchFamily="2" charset="-78"/>
                 <a:cs typeface="Amiri" pitchFamily="2" charset="-78"/>
               </a:rPr>
@@ -5046,7 +5046,7 @@
                 <a:solidFill>
                   <a:srgbClr val="FFFFFF"/>
                 </a:solidFill>
-                <a:latin typeface="Calibri" pitchFamily="34" charset="0"/>
+                <a:latin typeface="Amiri" pitchFamily="2" charset="-78"/>
                 <a:ea typeface="Amiri" pitchFamily="2" charset="-78"/>
                 <a:cs typeface="Amiri" pitchFamily="2" charset="-78"/>
               </a:rPr>
@@ -8603,7 +8603,7 @@
                 <a:solidFill>
                   <a:srgbClr val="FFFFFF"/>
                 </a:solidFill>
-                <a:latin typeface="Calibri" pitchFamily="34" charset="0"/>
+                <a:latin typeface="Amiri" pitchFamily="2" charset="-78"/>
                 <a:ea typeface="Amiri" pitchFamily="2" charset="-78"/>
                 <a:cs typeface="Amiri" pitchFamily="2" charset="-78"/>
               </a:rPr>
@@ -8669,7 +8669,7 @@
                 <a:solidFill>
                   <a:srgbClr val="FFFFFF"/>
                 </a:solidFill>
-                <a:latin typeface="Calibri" pitchFamily="34" charset="0"/>
+                <a:latin typeface="Amiri" pitchFamily="2" charset="-78"/>
                 <a:ea typeface="Amiri" pitchFamily="2" charset="-78"/>
                 <a:cs typeface="Amiri" pitchFamily="2" charset="-78"/>
               </a:rPr>
@@ -8735,7 +8735,7 @@
                 <a:solidFill>
                   <a:srgbClr val="FFFFFF"/>
                 </a:solidFill>
-                <a:latin typeface="Calibri" pitchFamily="34" charset="0"/>
+                <a:latin typeface="Amiri" pitchFamily="2" charset="-78"/>
                 <a:ea typeface="Amiri" pitchFamily="2" charset="-78"/>
                 <a:cs typeface="Amiri" pitchFamily="2" charset="-78"/>
               </a:rPr>
@@ -8801,7 +8801,7 @@
                 <a:solidFill>
                   <a:srgbClr val="FFFFFF"/>
                 </a:solidFill>
-                <a:latin typeface="Calibri" pitchFamily="34" charset="0"/>
+                <a:latin typeface="Amiri" pitchFamily="2" charset="-78"/>
                 <a:ea typeface="Amiri" pitchFamily="2" charset="-78"/>
                 <a:cs typeface="Amiri" pitchFamily="2" charset="-78"/>
               </a:rPr>
@@ -9588,7 +9588,7 @@
                 <a:solidFill>
                   <a:srgbClr val="FFFFFF"/>
                 </a:solidFill>
-                <a:latin typeface="Calibri" pitchFamily="34" charset="0"/>
+                <a:latin typeface="Amiri" pitchFamily="2" charset="-78"/>
                 <a:ea typeface="Amiri" pitchFamily="2" charset="-78"/>
                 <a:cs typeface="Amiri" pitchFamily="2" charset="-78"/>
               </a:rPr>
@@ -9654,7 +9654,7 @@
                 <a:solidFill>
                   <a:srgbClr val="FFFFFF"/>
                 </a:solidFill>
-                <a:latin typeface="Calibri" pitchFamily="34" charset="0"/>
+                <a:latin typeface="Amiri" pitchFamily="2" charset="-78"/>
                 <a:ea typeface="Amiri" pitchFamily="2" charset="-78"/>
                 <a:cs typeface="Amiri" pitchFamily="2" charset="-78"/>
               </a:rPr>
@@ -9720,7 +9720,7 @@
                 <a:solidFill>
                   <a:srgbClr val="FFFFFF"/>
                 </a:solidFill>
-                <a:latin typeface="Calibri" pitchFamily="34" charset="0"/>
+                <a:latin typeface="Amiri" pitchFamily="2" charset="-78"/>
                 <a:ea typeface="Amiri" pitchFamily="2" charset="-78"/>
                 <a:cs typeface="Amiri" pitchFamily="2" charset="-78"/>
               </a:rPr>
@@ -9786,7 +9786,7 @@
                 <a:solidFill>
                   <a:srgbClr val="FFFFFF"/>
                 </a:solidFill>
-                <a:latin typeface="Calibri" pitchFamily="34" charset="0"/>
+                <a:latin typeface="Amiri" pitchFamily="2" charset="-78"/>
                 <a:ea typeface="Amiri" pitchFamily="2" charset="-78"/>
                 <a:cs typeface="Amiri" pitchFamily="2" charset="-78"/>
               </a:rPr>
@@ -10573,7 +10573,7 @@
                 <a:solidFill>
                   <a:srgbClr val="FFFFFF"/>
                 </a:solidFill>
-                <a:latin typeface="Calibri" pitchFamily="34" charset="0"/>
+                <a:latin typeface="Amiri" pitchFamily="2" charset="-78"/>
                 <a:ea typeface="Amiri" pitchFamily="2" charset="-78"/>
                 <a:cs typeface="Amiri" pitchFamily="2" charset="-78"/>
               </a:rPr>
@@ -10639,7 +10639,7 @@
                 <a:solidFill>
                   <a:srgbClr val="FFFFFF"/>
                 </a:solidFill>
-                <a:latin typeface="Calibri" pitchFamily="34" charset="0"/>
+                <a:latin typeface="Amiri" pitchFamily="2" charset="-78"/>
                 <a:ea typeface="Amiri" pitchFamily="2" charset="-78"/>
                 <a:cs typeface="Amiri" pitchFamily="2" charset="-78"/>
               </a:rPr>
@@ -10705,7 +10705,7 @@
                 <a:solidFill>
                   <a:srgbClr val="FFFFFF"/>
                 </a:solidFill>
-                <a:latin typeface="Calibri" pitchFamily="34" charset="0"/>
+                <a:latin typeface="Amiri" pitchFamily="2" charset="-78"/>
                 <a:ea typeface="Amiri" pitchFamily="2" charset="-78"/>
                 <a:cs typeface="Amiri" pitchFamily="2" charset="-78"/>
               </a:rPr>
@@ -10771,7 +10771,7 @@
                 <a:solidFill>
                   <a:srgbClr val="FFFFFF"/>
                 </a:solidFill>
-                <a:latin typeface="Calibri" pitchFamily="34" charset="0"/>
+                <a:latin typeface="Amiri" pitchFamily="2" charset="-78"/>
                 <a:ea typeface="Amiri" pitchFamily="2" charset="-78"/>
                 <a:cs typeface="Amiri" pitchFamily="2" charset="-78"/>
               </a:rPr>
